--- a/decks/07-rag-evaluation.pptx
+++ b/decks/07-rag-evaluation.pptx
@@ -2,19 +2,21 @@
 <file path=ppt/presentation.xml><?xml version="1.0" encoding="utf-8"?>
 <p:presentation xmlns:p="http://schemas.openxmlformats.org/presentationml/2006/main">
   <p:sldMasterIdLst>
-    <p:sldMasterId xmlns:r="http://schemas.openxmlformats.org/officeDocument/2006/relationships" id="2147483648" r:id="R0488126ecfb344e5"/>
+    <p:sldMasterId xmlns:r="http://schemas.openxmlformats.org/officeDocument/2006/relationships" id="2147483648" r:id="R33bf81daaa564c7f"/>
   </p:sldMasterIdLst>
   <p:notesMasterIdLst>
-    <p:notesMasterId xmlns:r="http://schemas.openxmlformats.org/officeDocument/2006/relationships" r:id="R93bc4db92a654c28"/>
+    <p:notesMasterId xmlns:r="http://schemas.openxmlformats.org/officeDocument/2006/relationships" r:id="Ra2669c1b71d44cdc"/>
   </p:notesMasterIdLst>
   <p:sldIdLst>
-    <p:sldId xmlns:r="http://schemas.openxmlformats.org/officeDocument/2006/relationships" id="256" r:id="R047edd4dc7ae4a53"/>
-    <p:sldId xmlns:r="http://schemas.openxmlformats.org/officeDocument/2006/relationships" id="257" r:id="R4fdd343d33e248cb"/>
-    <p:sldId xmlns:r="http://schemas.openxmlformats.org/officeDocument/2006/relationships" id="258" r:id="R27758eb5f93d45fd"/>
-    <p:sldId xmlns:r="http://schemas.openxmlformats.org/officeDocument/2006/relationships" id="259" r:id="Ra0319b4c7860446e"/>
-    <p:sldId xmlns:r="http://schemas.openxmlformats.org/officeDocument/2006/relationships" id="260" r:id="R2e10962865a8487c"/>
-    <p:sldId xmlns:r="http://schemas.openxmlformats.org/officeDocument/2006/relationships" id="261" r:id="Rd8e501b713dd4378"/>
-    <p:sldId xmlns:r="http://schemas.openxmlformats.org/officeDocument/2006/relationships" id="262" r:id="Rcd35b68b4f7046f8"/>
+    <p:sldId xmlns:r="http://schemas.openxmlformats.org/officeDocument/2006/relationships" id="256" r:id="R1daa99db068849fc"/>
+    <p:sldId xmlns:r="http://schemas.openxmlformats.org/officeDocument/2006/relationships" id="257" r:id="R84914fda4e664c31"/>
+    <p:sldId xmlns:r="http://schemas.openxmlformats.org/officeDocument/2006/relationships" id="258" r:id="Rab699f307aaa4190"/>
+    <p:sldId xmlns:r="http://schemas.openxmlformats.org/officeDocument/2006/relationships" id="259" r:id="Ra14ca51e26574c97"/>
+    <p:sldId xmlns:r="http://schemas.openxmlformats.org/officeDocument/2006/relationships" id="260" r:id="R7bda7ca34a2c44e7"/>
+    <p:sldId xmlns:r="http://schemas.openxmlformats.org/officeDocument/2006/relationships" id="261" r:id="R744877a789b64ab5"/>
+    <p:sldId xmlns:r="http://schemas.openxmlformats.org/officeDocument/2006/relationships" id="262" r:id="Ra91639d336864a80"/>
+    <p:sldId xmlns:r="http://schemas.openxmlformats.org/officeDocument/2006/relationships" id="263" r:id="R94f4bc48ca22438c"/>
+    <p:sldId xmlns:r="http://schemas.openxmlformats.org/officeDocument/2006/relationships" id="264" r:id="R9067d115c28342dd"/>
   </p:sldIdLst>
   <p:sldSz cx="15240000" cy="8572500"/>
   <p:notesSz cx="6858000" cy="9144000"/>
@@ -1073,6 +1075,196 @@
 </p:notes>
 </file>
 
+<file path=ppt/notesSlides/notesSlide8.xml><?xml version="1.0" encoding="utf-8"?>
+<p:notes xmlns:p="http://schemas.openxmlformats.org/presentationml/2006/main">
+  <p:cSld>
+    <p:spTree>
+      <p:nvGrpSpPr>
+        <p:cNvPr id="1" name=""/>
+        <p:cNvGrpSpPr/>
+        <p:nvPr/>
+      </p:nvGrpSpPr>
+      <p:grpSpPr>
+        <a:xfrm xmlns:a="http://schemas.openxmlformats.org/drawingml/2006/main"/>
+      </p:grpSpPr>
+      <p:sp>
+        <p:nvSpPr>
+          <p:cNvPr id="2" name="Slide Image Placeholder 1"/>
+          <p:cNvSpPr>
+            <a:spLocks xmlns:a="http://schemas.openxmlformats.org/drawingml/2006/main" noGrp="1"/>
+          </p:cNvSpPr>
+          <p:nvPr>
+            <p:ph type="sldImg" idx="0"/>
+          </p:nvPr>
+        </p:nvSpPr>
+        <p:spPr/>
+      </p:sp>
+      <p:sp>
+        <p:nvSpPr>
+          <p:cNvPr id="3" name="Notes Placeholder 2"/>
+          <p:cNvSpPr>
+            <a:spLocks xmlns:a="http://schemas.openxmlformats.org/drawingml/2006/main" noGrp="1"/>
+          </p:cNvSpPr>
+          <p:nvPr>
+            <p:ph type="body" idx="1"/>
+          </p:nvPr>
+        </p:nvSpPr>
+        <p:spPr/>
+        <p:txBody>
+          <a:bodyPr xmlns:a="http://schemas.openxmlformats.org/drawingml/2006/main"/>
+          <a:lstStyle xmlns:a="http://schemas.openxmlformats.org/drawingml/2006/main"/>
+          <a:p xmlns:a="http://schemas.openxmlformats.org/drawingml/2006/main">
+            <a:r>
+              <a:t>Instructor purpose: Check the three core decisions before the lesson closes.</a:t>
+            </a:r>
+          </a:p>
+          <a:p xmlns:a="http://schemas.openxmlformats.org/drawingml/2006/main">
+            <a:r>
+              <a:t>Planned timing: 3 minutes.</a:t>
+            </a:r>
+          </a:p>
+          <a:p xmlns:a="http://schemas.openxmlformats.org/drawingml/2006/main">
+            <a:r>
+              <a:t>Facilitation: ask for one letter per question.</a:t>
+            </a:r>
+          </a:p>
+          <a:p xmlns:a="http://schemas.openxmlformats.org/drawingml/2006/main">
+            <a:r>
+              <a:t>[Sources]</a:t>
+            </a:r>
+          </a:p>
+          <a:p xmlns:a="http://schemas.openxmlformats.org/drawingml/2006/main">
+            <a:r>
+              <a:t>- chapters/07-rag-evaluation.md</a:t>
+            </a:r>
+          </a:p>
+          <a:p xmlns:a="http://schemas.openxmlformats.org/drawingml/2006/main">
+            <a:r>
+              <a:t>[/Sources]</a:t>
+            </a:r>
+          </a:p>
+        </p:txBody>
+      </p:sp>
+      <p:sp>
+        <p:nvSpPr>
+          <p:cNvPr id="4" name="Slide Number Placeholder 3"/>
+          <p:cNvSpPr>
+            <a:spLocks xmlns:a="http://schemas.openxmlformats.org/drawingml/2006/main" noGrp="1"/>
+          </p:cNvSpPr>
+          <p:nvPr>
+            <p:ph type="sldNum" idx="5"/>
+          </p:nvPr>
+        </p:nvSpPr>
+        <p:spPr/>
+        <p:txBody>
+          <a:bodyPr xmlns:a="http://schemas.openxmlformats.org/drawingml/2006/main"/>
+          <a:lstStyle xmlns:a="http://schemas.openxmlformats.org/drawingml/2006/main"/>
+          <a:p xmlns:a="http://schemas.openxmlformats.org/drawingml/2006/main"/>
+        </p:txBody>
+      </p:sp>
+    </p:spTree>
+  </p:cSld>
+  <p:clrMapOvr>
+    <a:masterClrMapping xmlns:a="http://schemas.openxmlformats.org/drawingml/2006/main"/>
+  </p:clrMapOvr>
+</p:notes>
+</file>
+
+<file path=ppt/notesSlides/notesSlide9.xml><?xml version="1.0" encoding="utf-8"?>
+<p:notes xmlns:p="http://schemas.openxmlformats.org/presentationml/2006/main">
+  <p:cSld>
+    <p:spTree>
+      <p:nvGrpSpPr>
+        <p:cNvPr id="1" name=""/>
+        <p:cNvGrpSpPr/>
+        <p:nvPr/>
+      </p:nvGrpSpPr>
+      <p:grpSpPr>
+        <a:xfrm xmlns:a="http://schemas.openxmlformats.org/drawingml/2006/main"/>
+      </p:grpSpPr>
+      <p:sp>
+        <p:nvSpPr>
+          <p:cNvPr id="2" name="Slide Image Placeholder 1"/>
+          <p:cNvSpPr>
+            <a:spLocks xmlns:a="http://schemas.openxmlformats.org/drawingml/2006/main" noGrp="1"/>
+          </p:cNvSpPr>
+          <p:nvPr>
+            <p:ph type="sldImg" idx="0"/>
+          </p:nvPr>
+        </p:nvSpPr>
+        <p:spPr/>
+      </p:sp>
+      <p:sp>
+        <p:nvSpPr>
+          <p:cNvPr id="3" name="Notes Placeholder 2"/>
+          <p:cNvSpPr>
+            <a:spLocks xmlns:a="http://schemas.openxmlformats.org/drawingml/2006/main" noGrp="1"/>
+          </p:cNvSpPr>
+          <p:nvPr>
+            <p:ph type="body" idx="1"/>
+          </p:nvPr>
+        </p:nvSpPr>
+        <p:spPr/>
+        <p:txBody>
+          <a:bodyPr xmlns:a="http://schemas.openxmlformats.org/drawingml/2006/main"/>
+          <a:lstStyle xmlns:a="http://schemas.openxmlformats.org/drawingml/2006/main"/>
+          <a:p xmlns:a="http://schemas.openxmlformats.org/drawingml/2006/main">
+            <a:r>
+              <a:t>Instructor purpose: Correct the quiz and restate the practical rule behind each answer.</a:t>
+            </a:r>
+          </a:p>
+          <a:p xmlns:a="http://schemas.openxmlformats.org/drawingml/2006/main">
+            <a:r>
+              <a:t>Planned timing: 3 minutes.</a:t>
+            </a:r>
+          </a:p>
+          <a:p xmlns:a="http://schemas.openxmlformats.org/drawingml/2006/main">
+            <a:r>
+              <a:t>Facilitation: ask learners to explain each rule in their own words.</a:t>
+            </a:r>
+          </a:p>
+          <a:p xmlns:a="http://schemas.openxmlformats.org/drawingml/2006/main">
+            <a:r>
+              <a:t>[Sources]</a:t>
+            </a:r>
+          </a:p>
+          <a:p xmlns:a="http://schemas.openxmlformats.org/drawingml/2006/main">
+            <a:r>
+              <a:t>- chapters/07-rag-evaluation.md</a:t>
+            </a:r>
+          </a:p>
+          <a:p xmlns:a="http://schemas.openxmlformats.org/drawingml/2006/main">
+            <a:r>
+              <a:t>[/Sources]</a:t>
+            </a:r>
+          </a:p>
+        </p:txBody>
+      </p:sp>
+      <p:sp>
+        <p:nvSpPr>
+          <p:cNvPr id="4" name="Slide Number Placeholder 3"/>
+          <p:cNvSpPr>
+            <a:spLocks xmlns:a="http://schemas.openxmlformats.org/drawingml/2006/main" noGrp="1"/>
+          </p:cNvSpPr>
+          <p:nvPr>
+            <p:ph type="sldNum" idx="5"/>
+          </p:nvPr>
+        </p:nvSpPr>
+        <p:spPr/>
+        <p:txBody>
+          <a:bodyPr xmlns:a="http://schemas.openxmlformats.org/drawingml/2006/main"/>
+          <a:lstStyle xmlns:a="http://schemas.openxmlformats.org/drawingml/2006/main"/>
+          <a:p xmlns:a="http://schemas.openxmlformats.org/drawingml/2006/main"/>
+        </p:txBody>
+      </p:sp>
+    </p:spTree>
+  </p:cSld>
+  <p:clrMapOvr>
+    <a:masterClrMapping xmlns:a="http://schemas.openxmlformats.org/drawingml/2006/main"/>
+  </p:clrMapOvr>
+</p:notes>
+</file>
+
 <file path=ppt/slideLayouts/slideLayout1.xml><?xml version="1.0" encoding="utf-8"?>
 <p:sldLayout xmlns:p="http://schemas.openxmlformats.org/presentationml/2006/main" type="title">
   <p:cSld name="Title Slide">
@@ -1111,7 +1303,7 @@
   </p:cSld>
   <p:clrMap bg1="lt1" tx1="dk1" bg2="lt2" tx2="dk2" accent1="accent1" accent2="accent2" accent3="accent3" accent4="accent4" accent5="accent5" accent6="accent6" hlink="hlink" folHlink="folHlink"/>
   <p:sldLayoutIdLst>
-    <p:sldLayoutId xmlns:r="http://schemas.openxmlformats.org/officeDocument/2006/relationships" id="2147483649" r:id="Rb3dd2b266e89449f"/>
+    <p:sldLayoutId xmlns:r="http://schemas.openxmlformats.org/officeDocument/2006/relationships" id="2147483649" r:id="R8400f13b628a4d6a"/>
   </p:sldLayoutIdLst>
   <p:txStyles>
     <p:titleStyle>
@@ -3260,7 +3452,7 @@
       </p:sp>
       <p:cxnSp>
         <p:nvCxnSpPr>
-          <p:cNvPr id="369" name=""/>
+          <p:cNvPr id="421" name=""/>
           <p:cNvCxnSpPr>
             <a:stCxn xmlns:a="http://schemas.openxmlformats.org/drawingml/2006/main" id="3" idx="3"/>
             <a:endCxn xmlns:a="http://schemas.openxmlformats.org/drawingml/2006/main" id="7" idx="1"/>
@@ -3286,7 +3478,7 @@
       </p:cxnSp>
       <p:cxnSp>
         <p:nvCxnSpPr>
-          <p:cNvPr id="370" name=""/>
+          <p:cNvPr id="422" name=""/>
           <p:cNvCxnSpPr>
             <a:stCxn xmlns:a="http://schemas.openxmlformats.org/drawingml/2006/main" id="7" idx="3"/>
             <a:endCxn xmlns:a="http://schemas.openxmlformats.org/drawingml/2006/main" id="11" idx="1"/>
@@ -3312,7 +3504,7 @@
       </p:cxnSp>
       <p:cxnSp>
         <p:nvCxnSpPr>
-          <p:cNvPr id="371" name=""/>
+          <p:cNvPr id="423" name=""/>
           <p:cNvCxnSpPr>
             <a:stCxn xmlns:a="http://schemas.openxmlformats.org/drawingml/2006/main" id="11" idx="3"/>
             <a:endCxn xmlns:a="http://schemas.openxmlformats.org/drawingml/2006/main" id="15" idx="1"/>
@@ -3338,7 +3530,7 @@
       </p:cxnSp>
       <p:cxnSp>
         <p:nvCxnSpPr>
-          <p:cNvPr id="372" name=""/>
+          <p:cNvPr id="424" name=""/>
           <p:cNvCxnSpPr>
             <a:stCxn xmlns:a="http://schemas.openxmlformats.org/drawingml/2006/main" id="15" idx="3"/>
             <a:endCxn xmlns:a="http://schemas.openxmlformats.org/drawingml/2006/main" id="19" idx="1"/>
@@ -9179,7 +9371,7 @@
       </p:sp>
       <p:cxnSp>
         <p:nvCxnSpPr>
-          <p:cNvPr id="369" name=""/>
+          <p:cNvPr id="421" name=""/>
           <p:cNvCxnSpPr>
             <a:stCxn xmlns:a="http://schemas.openxmlformats.org/drawingml/2006/main" id="3" idx="3"/>
             <a:endCxn xmlns:a="http://schemas.openxmlformats.org/drawingml/2006/main" id="7" idx="1"/>
@@ -9205,7 +9397,7 @@
       </p:cxnSp>
       <p:cxnSp>
         <p:nvCxnSpPr>
-          <p:cNvPr id="370" name=""/>
+          <p:cNvPr id="422" name=""/>
           <p:cNvCxnSpPr>
             <a:stCxn xmlns:a="http://schemas.openxmlformats.org/drawingml/2006/main" id="7" idx="3"/>
             <a:endCxn xmlns:a="http://schemas.openxmlformats.org/drawingml/2006/main" id="11" idx="1"/>
@@ -9231,7 +9423,7 @@
       </p:cxnSp>
       <p:cxnSp>
         <p:nvCxnSpPr>
-          <p:cNvPr id="371" name=""/>
+          <p:cNvPr id="423" name=""/>
           <p:cNvCxnSpPr>
             <a:stCxn xmlns:a="http://schemas.openxmlformats.org/drawingml/2006/main" id="11" idx="3"/>
             <a:endCxn xmlns:a="http://schemas.openxmlformats.org/drawingml/2006/main" id="15" idx="1"/>
@@ -9257,7 +9449,7 @@
       </p:cxnSp>
       <p:cxnSp>
         <p:nvCxnSpPr>
-          <p:cNvPr id="372" name=""/>
+          <p:cNvPr id="424" name=""/>
           <p:cNvCxnSpPr>
             <a:stCxn xmlns:a="http://schemas.openxmlformats.org/drawingml/2006/main" id="15" idx="3"/>
             <a:endCxn xmlns:a="http://schemas.openxmlformats.org/drawingml/2006/main" id="19" idx="1"/>
@@ -10979,7 +11171,7 @@
       </p:sp>
       <p:cxnSp>
         <p:nvCxnSpPr>
-          <p:cNvPr id="369" name=""/>
+          <p:cNvPr id="421" name=""/>
           <p:cNvCxnSpPr>
             <a:stCxn xmlns:a="http://schemas.openxmlformats.org/drawingml/2006/main" id="3" idx="3"/>
             <a:endCxn xmlns:a="http://schemas.openxmlformats.org/drawingml/2006/main" id="7" idx="1"/>
@@ -11005,7 +11197,7 @@
       </p:cxnSp>
       <p:cxnSp>
         <p:nvCxnSpPr>
-          <p:cNvPr id="370" name=""/>
+          <p:cNvPr id="422" name=""/>
           <p:cNvCxnSpPr>
             <a:stCxn xmlns:a="http://schemas.openxmlformats.org/drawingml/2006/main" id="7" idx="3"/>
             <a:endCxn xmlns:a="http://schemas.openxmlformats.org/drawingml/2006/main" id="11" idx="1"/>
@@ -11031,7 +11223,7 @@
       </p:cxnSp>
       <p:cxnSp>
         <p:nvCxnSpPr>
-          <p:cNvPr id="371" name=""/>
+          <p:cNvPr id="423" name=""/>
           <p:cNvCxnSpPr>
             <a:stCxn xmlns:a="http://schemas.openxmlformats.org/drawingml/2006/main" id="11" idx="3"/>
             <a:endCxn xmlns:a="http://schemas.openxmlformats.org/drawingml/2006/main" id="15" idx="1"/>
@@ -11057,7 +11249,7 @@
       </p:cxnSp>
       <p:cxnSp>
         <p:nvCxnSpPr>
-          <p:cNvPr id="372" name=""/>
+          <p:cNvPr id="424" name=""/>
           <p:cNvCxnSpPr>
             <a:stCxn xmlns:a="http://schemas.openxmlformats.org/drawingml/2006/main" id="15" idx="3"/>
             <a:endCxn xmlns:a="http://schemas.openxmlformats.org/drawingml/2006/main" id="19" idx="1"/>
@@ -12349,7 +12541,7 @@
       </p:sp>
       <p:cxnSp>
         <p:nvCxnSpPr>
-          <p:cNvPr id="208" name=""/>
+          <p:cNvPr id="236" name=""/>
           <p:cNvCxnSpPr>
             <a:stCxn xmlns:a="http://schemas.openxmlformats.org/drawingml/2006/main" id="3" idx="3"/>
             <a:endCxn xmlns:a="http://schemas.openxmlformats.org/drawingml/2006/main" id="6" idx="1"/>
@@ -12375,7 +12567,7 @@
       </p:cxnSp>
       <p:cxnSp>
         <p:nvCxnSpPr>
-          <p:cNvPr id="209" name=""/>
+          <p:cNvPr id="237" name=""/>
           <p:cNvCxnSpPr>
             <a:stCxn xmlns:a="http://schemas.openxmlformats.org/drawingml/2006/main" id="6" idx="3"/>
             <a:endCxn xmlns:a="http://schemas.openxmlformats.org/drawingml/2006/main" id="10" idx="1"/>
@@ -13095,6 +13287,1350 @@
     <p:extLst>
       <p:ext uri="{BB962C8B-B14F-4D97-AF65-F5344CB8AC3E}">
         <p14:creationId xmlns:p14="http://schemas.microsoft.com/office/powerpoint/2010/main" val="1663571577"/>
+      </p:ext>
+    </p:extLst>
+  </p:cSld>
+</p:sld>
+</file>
+
+<file path=ppt/slides/slide8.xml><?xml version="1.0" encoding="utf-8"?>
+<p:sld xmlns:p="http://schemas.openxmlformats.org/presentationml/2006/main">
+  <p:cSld>
+    <p:bg>
+      <p:bgPr>
+        <a:solidFill xmlns:a="http://schemas.openxmlformats.org/drawingml/2006/main">
+          <a:srgbClr val="F5F5F5"/>
+        </a:solidFill>
+      </p:bgPr>
+    </p:bg>
+    <p:spTree>
+      <p:nvGrpSpPr>
+        <p:cNvPr id="1" name=""/>
+        <p:cNvGrpSpPr/>
+        <p:nvPr/>
+      </p:nvGrpSpPr>
+      <p:grpSpPr>
+        <a:xfrm xmlns:a="http://schemas.openxmlformats.org/drawingml/2006/main"/>
+      </p:grpSpPr>
+      <p:sp>
+        <p:nvSpPr>
+          <p:cNvPr id="7" name="">
+            <a:extLst xmlns:a="http://schemas.openxmlformats.org/drawingml/2006/main">
+              <a:ext uri="{FF2B5EF4-FFF2-40B4-BE49-F238E27FC236}">
+                <a16:creationId xmlns:a16="http://schemas.microsoft.com/office/drawing/2014/main" id="{2E1E88F9-4976-411E-8732-D45BE311BBD2}"/>
+              </a:ext>
+            </a:extLst>
+          </p:cNvPr>
+          <p:cNvSpPr>
+            <a:spLocks xmlns:a="http://schemas.openxmlformats.org/drawingml/2006/main" noGrp="1"/>
+          </p:cNvSpPr>
+          <p:nvPr/>
+        </p:nvSpPr>
+        <p:spPr>
+          <a:xfrm xmlns:a="http://schemas.openxmlformats.org/drawingml/2006/main">
+            <a:off x="971550" y="781050"/>
+            <a:ext cx="1257300" cy="76200"/>
+          </a:xfrm>
+          <a:prstGeom xmlns:a="http://schemas.openxmlformats.org/drawingml/2006/main" prst="rect">
+            <a:avLst/>
+          </a:prstGeom>
+          <a:solidFill xmlns:a="http://schemas.openxmlformats.org/drawingml/2006/main">
+            <a:srgbClr val="00A2EB"/>
+          </a:solidFill>
+          <a:ln xmlns:a="http://schemas.openxmlformats.org/drawingml/2006/main" w="0">
+            <a:solidFill>
+              <a:srgbClr val="00A2EB"/>
+            </a:solidFill>
+            <a:prstDash val="solid"/>
+          </a:ln>
+        </p:spPr>
+      </p:sp>
+      <p:sp>
+        <p:nvSpPr>
+          <p:cNvPr id="2" name="">
+            <a:extLst xmlns:a="http://schemas.openxmlformats.org/drawingml/2006/main">
+              <a:ext uri="{FF2B5EF4-FFF2-40B4-BE49-F238E27FC236}">
+                <a16:creationId xmlns:a16="http://schemas.microsoft.com/office/drawing/2014/main" id="{35C43047-00B1-4B7A-BB36-D272D2C9B6CA}"/>
+              </a:ext>
+            </a:extLst>
+          </p:cNvPr>
+          <p:cNvSpPr>
+            <a:spLocks xmlns:a="http://schemas.openxmlformats.org/drawingml/2006/main" noGrp="1"/>
+          </p:cNvSpPr>
+          <p:nvPr/>
+        </p:nvSpPr>
+        <p:spPr>
+          <a:xfrm xmlns:a="http://schemas.openxmlformats.org/drawingml/2006/main">
+            <a:off x="971550" y="1066800"/>
+            <a:ext cx="2857500" cy="419100"/>
+          </a:xfrm>
+          <a:prstGeom xmlns:a="http://schemas.openxmlformats.org/drawingml/2006/main" prst="rect">
+            <a:avLst/>
+          </a:prstGeom>
+          <a:noFill xmlns:a="http://schemas.openxmlformats.org/drawingml/2006/main"/>
+          <a:ln xmlns:a="http://schemas.openxmlformats.org/drawingml/2006/main" w="0">
+            <a:noFill/>
+            <a:prstDash val="solid"/>
+          </a:ln>
+        </p:spPr>
+        <p:txBody>
+          <a:bodyPr xmlns:a="http://schemas.openxmlformats.org/drawingml/2006/main" wrap="square" lIns="0" tIns="0" rIns="0" bIns="0" anchor="ctr">
+            <a:normAutofit fontScale="100000"/>
+          </a:bodyPr>
+          <a:lstStyle xmlns:a="http://schemas.openxmlformats.org/drawingml/2006/main"/>
+          <a:p xmlns:a="http://schemas.openxmlformats.org/drawingml/2006/main">
+            <a:pPr algn="l">
+              <a:lnSpc>
+                <a:spcPct val="100000"/>
+              </a:lnSpc>
+              <a:buNone/>
+              <a:defRPr sz="1575" b="1">
+                <a:solidFill>
+                  <a:srgbClr val="1F40CB"/>
+                </a:solidFill>
+                <a:latin typeface="Calibri"/>
+                <a:ea typeface="Calibri"/>
+                <a:cs typeface="Calibri"/>
+              </a:defRPr>
+            </a:pPr>
+            <a:r>
+              <a:rPr sz="1575" b="1">
+                <a:solidFill>
+                  <a:srgbClr val="1F40CB"/>
+                </a:solidFill>
+                <a:latin typeface="Calibri"/>
+                <a:ea typeface="Calibri"/>
+                <a:cs typeface="Calibri"/>
+              </a:rPr>
+              <a:t>FIRST FINANCE</a:t>
+            </a:r>
+          </a:p>
+        </p:txBody>
+      </p:sp>
+      <p:sp>
+        <p:nvSpPr>
+          <p:cNvPr id="3" name="">
+            <a:extLst xmlns:a="http://schemas.openxmlformats.org/drawingml/2006/main">
+              <a:ext uri="{FF2B5EF4-FFF2-40B4-BE49-F238E27FC236}">
+                <a16:creationId xmlns:a16="http://schemas.microsoft.com/office/drawing/2014/main" id="{2EBB9B00-5773-4D90-9774-8BB7FE35221F}"/>
+              </a:ext>
+            </a:extLst>
+          </p:cNvPr>
+          <p:cNvSpPr>
+            <a:spLocks xmlns:a="http://schemas.openxmlformats.org/drawingml/2006/main" noGrp="1"/>
+          </p:cNvSpPr>
+          <p:nvPr/>
+        </p:nvSpPr>
+        <p:spPr>
+          <a:xfrm xmlns:a="http://schemas.openxmlformats.org/drawingml/2006/main">
+            <a:off x="971550" y="2362200"/>
+            <a:ext cx="13296900" cy="895350"/>
+          </a:xfrm>
+          <a:prstGeom xmlns:a="http://schemas.openxmlformats.org/drawingml/2006/main" prst="rect">
+            <a:avLst/>
+          </a:prstGeom>
+          <a:noFill xmlns:a="http://schemas.openxmlformats.org/drawingml/2006/main"/>
+          <a:ln xmlns:a="http://schemas.openxmlformats.org/drawingml/2006/main" w="0">
+            <a:noFill/>
+            <a:prstDash val="solid"/>
+          </a:ln>
+        </p:spPr>
+        <p:txBody>
+          <a:bodyPr xmlns:a="http://schemas.openxmlformats.org/drawingml/2006/main" wrap="none" lIns="0" tIns="0" rIns="0" bIns="0" anchor="ctr">
+            <a:normAutofit fontScale="100000"/>
+          </a:bodyPr>
+          <a:lstStyle xmlns:a="http://schemas.openxmlformats.org/drawingml/2006/main"/>
+          <a:p xmlns:a="http://schemas.openxmlformats.org/drawingml/2006/main">
+            <a:pPr algn="l">
+              <a:lnSpc>
+                <a:spcPct val="100000"/>
+              </a:lnSpc>
+              <a:buNone/>
+              <a:defRPr sz="4800" b="1">
+                <a:solidFill>
+                  <a:srgbClr val="051C2A"/>
+                </a:solidFill>
+                <a:latin typeface="Calibri"/>
+                <a:ea typeface="Calibri"/>
+                <a:cs typeface="Calibri"/>
+              </a:defRPr>
+            </a:pPr>
+            <a:r>
+              <a:rPr sz="4800" b="1">
+                <a:solidFill>
+                  <a:srgbClr val="051C2A"/>
+                </a:solidFill>
+                <a:latin typeface="Calibri"/>
+                <a:ea typeface="Calibri"/>
+                <a:cs typeface="Calibri"/>
+              </a:rPr>
+              <a:t>Quick quiz</a:t>
+            </a:r>
+          </a:p>
+        </p:txBody>
+      </p:sp>
+      <p:sp>
+        <p:nvSpPr>
+          <p:cNvPr id="4" name="">
+            <a:extLst xmlns:a="http://schemas.openxmlformats.org/drawingml/2006/main">
+              <a:ext uri="{FF2B5EF4-FFF2-40B4-BE49-F238E27FC236}">
+                <a16:creationId xmlns:a16="http://schemas.microsoft.com/office/drawing/2014/main" id="{601F96F8-8EA3-4B69-A3AF-EBD5CBCD09C1}"/>
+              </a:ext>
+            </a:extLst>
+          </p:cNvPr>
+          <p:cNvSpPr>
+            <a:spLocks xmlns:a="http://schemas.openxmlformats.org/drawingml/2006/main" noGrp="1"/>
+          </p:cNvSpPr>
+          <p:nvPr/>
+        </p:nvSpPr>
+        <p:spPr>
+          <a:xfrm xmlns:a="http://schemas.openxmlformats.org/drawingml/2006/main">
+            <a:off x="971550" y="3562350"/>
+            <a:ext cx="11239500" cy="514350"/>
+          </a:xfrm>
+          <a:prstGeom xmlns:a="http://schemas.openxmlformats.org/drawingml/2006/main" prst="rect">
+            <a:avLst/>
+          </a:prstGeom>
+          <a:noFill xmlns:a="http://schemas.openxmlformats.org/drawingml/2006/main"/>
+          <a:ln xmlns:a="http://schemas.openxmlformats.org/drawingml/2006/main" w="0">
+            <a:noFill/>
+            <a:prstDash val="solid"/>
+          </a:ln>
+        </p:spPr>
+        <p:txBody>
+          <a:bodyPr xmlns:a="http://schemas.openxmlformats.org/drawingml/2006/main" wrap="square" lIns="0" tIns="0" rIns="0" bIns="0" anchor="ctr">
+            <a:normAutofit fontScale="100000"/>
+          </a:bodyPr>
+          <a:lstStyle xmlns:a="http://schemas.openxmlformats.org/drawingml/2006/main"/>
+          <a:p xmlns:a="http://schemas.openxmlformats.org/drawingml/2006/main">
+            <a:pPr algn="l">
+              <a:lnSpc>
+                <a:spcPct val="100000"/>
+              </a:lnSpc>
+              <a:buNone/>
+              <a:defRPr sz="2400" b="0">
+                <a:solidFill>
+                  <a:srgbClr val="3F3F42"/>
+                </a:solidFill>
+                <a:latin typeface="Calibri"/>
+                <a:ea typeface="Calibri"/>
+                <a:cs typeface="Calibri"/>
+              </a:defRPr>
+            </a:pPr>
+            <a:r>
+              <a:rPr sz="2400" b="0">
+                <a:solidFill>
+                  <a:srgbClr val="3F3F42"/>
+                </a:solidFill>
+                <a:latin typeface="Calibri"/>
+                <a:ea typeface="Calibri"/>
+                <a:cs typeface="Calibri"/>
+              </a:rPr>
+              <a:t>Choose one answer for each question.</a:t>
+            </a:r>
+          </a:p>
+        </p:txBody>
+      </p:sp>
+      <p:sp>
+        <p:nvSpPr>
+          <p:cNvPr id="5" name="">
+            <a:extLst xmlns:a="http://schemas.openxmlformats.org/drawingml/2006/main">
+              <a:ext uri="{FF2B5EF4-FFF2-40B4-BE49-F238E27FC236}">
+                <a16:creationId xmlns:a16="http://schemas.microsoft.com/office/drawing/2014/main" id="{D4A6E89B-2708-4600-B820-727EF660DE6B}"/>
+              </a:ext>
+            </a:extLst>
+          </p:cNvPr>
+          <p:cNvSpPr>
+            <a:spLocks xmlns:a="http://schemas.openxmlformats.org/drawingml/2006/main" noGrp="1"/>
+          </p:cNvSpPr>
+          <p:nvPr/>
+        </p:nvSpPr>
+        <p:spPr>
+          <a:xfrm xmlns:a="http://schemas.openxmlformats.org/drawingml/2006/main">
+            <a:off x="971550" y="6477000"/>
+            <a:ext cx="9525000" cy="400050"/>
+          </a:xfrm>
+          <a:prstGeom xmlns:a="http://schemas.openxmlformats.org/drawingml/2006/main" prst="rect">
+            <a:avLst/>
+          </a:prstGeom>
+          <a:noFill xmlns:a="http://schemas.openxmlformats.org/drawingml/2006/main"/>
+          <a:ln xmlns:a="http://schemas.openxmlformats.org/drawingml/2006/main" w="0">
+            <a:noFill/>
+            <a:prstDash val="solid"/>
+          </a:ln>
+        </p:spPr>
+        <p:txBody>
+          <a:bodyPr xmlns:a="http://schemas.openxmlformats.org/drawingml/2006/main" wrap="square" lIns="0" tIns="0" rIns="0" bIns="0" anchor="ctr">
+            <a:normAutofit fontScale="100000"/>
+          </a:bodyPr>
+          <a:lstStyle xmlns:a="http://schemas.openxmlformats.org/drawingml/2006/main"/>
+          <a:p xmlns:a="http://schemas.openxmlformats.org/drawingml/2006/main">
+            <a:pPr algn="l">
+              <a:lnSpc>
+                <a:spcPct val="100000"/>
+              </a:lnSpc>
+              <a:buNone/>
+              <a:defRPr sz="1350" b="1">
+                <a:solidFill>
+                  <a:srgbClr val="1F40CB"/>
+                </a:solidFill>
+                <a:latin typeface="Calibri"/>
+                <a:ea typeface="Calibri"/>
+                <a:cs typeface="Calibri"/>
+              </a:defRPr>
+            </a:pPr>
+            <a:r>
+              <a:rPr sz="1350" b="1">
+                <a:solidFill>
+                  <a:srgbClr val="1F40CB"/>
+                </a:solidFill>
+                <a:latin typeface="Calibri"/>
+                <a:ea typeface="Calibri"/>
+                <a:cs typeface="Calibri"/>
+              </a:rPr>
+              <a:t>LESSON 07  ·  3 QUESTIONS  ·  3 MINUTES</a:t>
+            </a:r>
+          </a:p>
+        </p:txBody>
+      </p:sp>
+      <p:sp>
+        <p:nvSpPr>
+          <p:cNvPr id="6" name="">
+            <a:extLst xmlns:a="http://schemas.openxmlformats.org/drawingml/2006/main">
+              <a:ext uri="{FF2B5EF4-FFF2-40B4-BE49-F238E27FC236}">
+                <a16:creationId xmlns:a16="http://schemas.microsoft.com/office/drawing/2014/main" id="{053831D6-7D46-4F1A-929F-D2CAD97F1627}"/>
+              </a:ext>
+            </a:extLst>
+          </p:cNvPr>
+          <p:cNvSpPr>
+            <a:spLocks xmlns:a="http://schemas.openxmlformats.org/drawingml/2006/main" noGrp="1"/>
+          </p:cNvSpPr>
+          <p:nvPr/>
+        </p:nvSpPr>
+        <p:spPr>
+          <a:xfrm xmlns:a="http://schemas.openxmlformats.org/drawingml/2006/main">
+            <a:off x="971550" y="7067550"/>
+            <a:ext cx="4762500" cy="381000"/>
+          </a:xfrm>
+          <a:prstGeom xmlns:a="http://schemas.openxmlformats.org/drawingml/2006/main" prst="rect">
+            <a:avLst/>
+          </a:prstGeom>
+          <a:noFill xmlns:a="http://schemas.openxmlformats.org/drawingml/2006/main"/>
+          <a:ln xmlns:a="http://schemas.openxmlformats.org/drawingml/2006/main" w="0">
+            <a:noFill/>
+            <a:prstDash val="solid"/>
+          </a:ln>
+        </p:spPr>
+        <p:txBody>
+          <a:bodyPr xmlns:a="http://schemas.openxmlformats.org/drawingml/2006/main" wrap="square" lIns="0" tIns="0" rIns="0" bIns="0" anchor="ctr">
+            <a:normAutofit fontScale="100000"/>
+          </a:bodyPr>
+          <a:lstStyle xmlns:a="http://schemas.openxmlformats.org/drawingml/2006/main"/>
+          <a:p xmlns:a="http://schemas.openxmlformats.org/drawingml/2006/main">
+            <a:pPr algn="l">
+              <a:lnSpc>
+                <a:spcPct val="100000"/>
+              </a:lnSpc>
+              <a:buNone/>
+              <a:defRPr sz="1725" b="0">
+                <a:solidFill>
+                  <a:srgbClr val="051C2A"/>
+                </a:solidFill>
+                <a:latin typeface="Calibri"/>
+                <a:ea typeface="Calibri"/>
+                <a:cs typeface="Calibri"/>
+              </a:defRPr>
+            </a:pPr>
+            <a:r>
+              <a:rPr sz="1725" b="0">
+                <a:solidFill>
+                  <a:srgbClr val="051C2A"/>
+                </a:solidFill>
+                <a:latin typeface="Calibri"/>
+                <a:ea typeface="Calibri"/>
+                <a:cs typeface="Calibri"/>
+              </a:rPr>
+              <a:t>First Finance - Arnaud Demes</a:t>
+            </a:r>
+          </a:p>
+        </p:txBody>
+      </p:sp>
+      <p:sp>
+        <p:nvSpPr>
+          <p:cNvPr id="8" name="quiz-question-1">
+            <a:extLst xmlns:a="http://schemas.openxmlformats.org/drawingml/2006/main">
+              <a:ext uri="{FF2B5EF4-FFF2-40B4-BE49-F238E27FC236}">
+                <a16:creationId xmlns:a16="http://schemas.microsoft.com/office/drawing/2014/main" id="{DB427797-A20C-4DCA-9113-F4F5AACF2DDD}"/>
+              </a:ext>
+            </a:extLst>
+          </p:cNvPr>
+          <p:cNvSpPr>
+            <a:spLocks xmlns:a="http://schemas.openxmlformats.org/drawingml/2006/main" noGrp="1"/>
+          </p:cNvSpPr>
+          <p:nvPr/>
+        </p:nvSpPr>
+        <p:spPr>
+          <a:xfrm xmlns:a="http://schemas.openxmlformats.org/drawingml/2006/main">
+            <a:off x="971550" y="4400550"/>
+            <a:ext cx="13296900" cy="285750"/>
+          </a:xfrm>
+          <a:prstGeom xmlns:a="http://schemas.openxmlformats.org/drawingml/2006/main" prst="rect">
+            <a:avLst/>
+          </a:prstGeom>
+          <a:noFill xmlns:a="http://schemas.openxmlformats.org/drawingml/2006/main"/>
+          <a:ln xmlns:a="http://schemas.openxmlformats.org/drawingml/2006/main" w="0">
+            <a:noFill/>
+            <a:prstDash val="solid"/>
+          </a:ln>
+        </p:spPr>
+        <p:txBody>
+          <a:bodyPr xmlns:a="http://schemas.openxmlformats.org/drawingml/2006/main"/>
+          <a:lstStyle xmlns:a="http://schemas.openxmlformats.org/drawingml/2006/main"/>
+          <a:p xmlns:a="http://schemas.openxmlformats.org/drawingml/2006/main">
+            <a:pPr>
+              <a:defRPr sz="1500" b="1">
+                <a:solidFill>
+                  <a:srgbClr val="001B2E"/>
+                </a:solidFill>
+              </a:defRPr>
+            </a:pPr>
+            <a:r>
+              <a:rPr sz="1500" b="1">
+                <a:solidFill>
+                  <a:srgbClr val="001B2E"/>
+                </a:solidFill>
+              </a:rPr>
+              <a:t>1. Can retrieval pass while citation correctness fails?</a:t>
+            </a:r>
+          </a:p>
+        </p:txBody>
+      </p:sp>
+      <p:sp>
+        <p:nvSpPr>
+          <p:cNvPr id="9" name="quiz-options-1">
+            <a:extLst xmlns:a="http://schemas.openxmlformats.org/drawingml/2006/main">
+              <a:ext uri="{FF2B5EF4-FFF2-40B4-BE49-F238E27FC236}">
+                <a16:creationId xmlns:a16="http://schemas.microsoft.com/office/drawing/2014/main" id="{C1D75858-DC7F-4C93-9229-D7D2B5921111}"/>
+              </a:ext>
+            </a:extLst>
+          </p:cNvPr>
+          <p:cNvSpPr>
+            <a:spLocks xmlns:a="http://schemas.openxmlformats.org/drawingml/2006/main" noGrp="1"/>
+          </p:cNvSpPr>
+          <p:nvPr/>
+        </p:nvSpPr>
+        <p:spPr>
+          <a:xfrm xmlns:a="http://schemas.openxmlformats.org/drawingml/2006/main">
+            <a:off x="1257300" y="4705350"/>
+            <a:ext cx="13011150" cy="247650"/>
+          </a:xfrm>
+          <a:prstGeom xmlns:a="http://schemas.openxmlformats.org/drawingml/2006/main" prst="rect">
+            <a:avLst/>
+          </a:prstGeom>
+          <a:noFill xmlns:a="http://schemas.openxmlformats.org/drawingml/2006/main"/>
+          <a:ln xmlns:a="http://schemas.openxmlformats.org/drawingml/2006/main" w="0">
+            <a:noFill/>
+            <a:prstDash val="solid"/>
+          </a:ln>
+        </p:spPr>
+        <p:txBody>
+          <a:bodyPr xmlns:a="http://schemas.openxmlformats.org/drawingml/2006/main"/>
+          <a:lstStyle xmlns:a="http://schemas.openxmlformats.org/drawingml/2006/main"/>
+          <a:p xmlns:a="http://schemas.openxmlformats.org/drawingml/2006/main">
+            <a:pPr>
+              <a:defRPr sz="1200" b="0">
+                <a:solidFill>
+                  <a:srgbClr val="334155"/>
+                </a:solidFill>
+              </a:defRPr>
+            </a:pPr>
+            <a:r>
+              <a:rPr sz="1200" b="0">
+                <a:solidFill>
+                  <a:srgbClr val="334155"/>
+                </a:solidFill>
+              </a:rPr>
+              <a:t>A  Yes     |     B  No     |     C  Only online</a:t>
+            </a:r>
+          </a:p>
+        </p:txBody>
+      </p:sp>
+      <p:sp>
+        <p:nvSpPr>
+          <p:cNvPr id="10" name="quiz-question-2">
+            <a:extLst xmlns:a="http://schemas.openxmlformats.org/drawingml/2006/main">
+              <a:ext uri="{FF2B5EF4-FFF2-40B4-BE49-F238E27FC236}">
+                <a16:creationId xmlns:a16="http://schemas.microsoft.com/office/drawing/2014/main" id="{FA95D8A6-C421-45A9-B168-5050D28DE820}"/>
+              </a:ext>
+            </a:extLst>
+          </p:cNvPr>
+          <p:cNvSpPr>
+            <a:spLocks xmlns:a="http://schemas.openxmlformats.org/drawingml/2006/main" noGrp="1"/>
+          </p:cNvSpPr>
+          <p:nvPr/>
+        </p:nvSpPr>
+        <p:spPr>
+          <a:xfrm xmlns:a="http://schemas.openxmlformats.org/drawingml/2006/main">
+            <a:off x="971550" y="5086350"/>
+            <a:ext cx="13296900" cy="285750"/>
+          </a:xfrm>
+          <a:prstGeom xmlns:a="http://schemas.openxmlformats.org/drawingml/2006/main" prst="rect">
+            <a:avLst/>
+          </a:prstGeom>
+          <a:noFill xmlns:a="http://schemas.openxmlformats.org/drawingml/2006/main"/>
+          <a:ln xmlns:a="http://schemas.openxmlformats.org/drawingml/2006/main" w="0">
+            <a:noFill/>
+            <a:prstDash val="solid"/>
+          </a:ln>
+        </p:spPr>
+        <p:txBody>
+          <a:bodyPr xmlns:a="http://schemas.openxmlformats.org/drawingml/2006/main"/>
+          <a:lstStyle xmlns:a="http://schemas.openxmlformats.org/drawingml/2006/main"/>
+          <a:p xmlns:a="http://schemas.openxmlformats.org/drawingml/2006/main">
+            <a:pPr>
+              <a:defRPr sz="1500" b="1">
+                <a:solidFill>
+                  <a:srgbClr val="001B2E"/>
+                </a:solidFill>
+              </a:defRPr>
+            </a:pPr>
+            <a:r>
+              <a:rPr sz="1500" b="1">
+                <a:solidFill>
+                  <a:srgbClr val="001B2E"/>
+                </a:solidFill>
+              </a:rPr>
+              <a:t>2. What must stay fixed when comparing two RAG configurations?</a:t>
+            </a:r>
+          </a:p>
+        </p:txBody>
+      </p:sp>
+      <p:sp>
+        <p:nvSpPr>
+          <p:cNvPr id="11" name="quiz-options-2">
+            <a:extLst xmlns:a="http://schemas.openxmlformats.org/drawingml/2006/main">
+              <a:ext uri="{FF2B5EF4-FFF2-40B4-BE49-F238E27FC236}">
+                <a16:creationId xmlns:a16="http://schemas.microsoft.com/office/drawing/2014/main" id="{57FCB6CD-C1CA-4B2F-A5A0-E9A9A01D17B7}"/>
+              </a:ext>
+            </a:extLst>
+          </p:cNvPr>
+          <p:cNvSpPr>
+            <a:spLocks xmlns:a="http://schemas.openxmlformats.org/drawingml/2006/main" noGrp="1"/>
+          </p:cNvSpPr>
+          <p:nvPr/>
+        </p:nvSpPr>
+        <p:spPr>
+          <a:xfrm xmlns:a="http://schemas.openxmlformats.org/drawingml/2006/main">
+            <a:off x="1257300" y="5391150"/>
+            <a:ext cx="13011150" cy="247650"/>
+          </a:xfrm>
+          <a:prstGeom xmlns:a="http://schemas.openxmlformats.org/drawingml/2006/main" prst="rect">
+            <a:avLst/>
+          </a:prstGeom>
+          <a:noFill xmlns:a="http://schemas.openxmlformats.org/drawingml/2006/main"/>
+          <a:ln xmlns:a="http://schemas.openxmlformats.org/drawingml/2006/main" w="0">
+            <a:noFill/>
+            <a:prstDash val="solid"/>
+          </a:ln>
+        </p:spPr>
+        <p:txBody>
+          <a:bodyPr xmlns:a="http://schemas.openxmlformats.org/drawingml/2006/main"/>
+          <a:lstStyle xmlns:a="http://schemas.openxmlformats.org/drawingml/2006/main"/>
+          <a:p xmlns:a="http://schemas.openxmlformats.org/drawingml/2006/main">
+            <a:pPr>
+              <a:defRPr sz="1200" b="0">
+                <a:solidFill>
+                  <a:srgbClr val="334155"/>
+                </a:solidFill>
+              </a:defRPr>
+            </a:pPr>
+            <a:r>
+              <a:rPr sz="1200" b="0">
+                <a:solidFill>
+                  <a:srgbClr val="334155"/>
+                </a:solidFill>
+              </a:rPr>
+              <a:t>A  Golden set     |     B  Result     |     C  Latency</a:t>
+            </a:r>
+          </a:p>
+        </p:txBody>
+      </p:sp>
+      <p:sp>
+        <p:nvSpPr>
+          <p:cNvPr id="12" name="quiz-question-3">
+            <a:extLst xmlns:a="http://schemas.openxmlformats.org/drawingml/2006/main">
+              <a:ext uri="{FF2B5EF4-FFF2-40B4-BE49-F238E27FC236}">
+                <a16:creationId xmlns:a16="http://schemas.microsoft.com/office/drawing/2014/main" id="{119F4EF1-122E-4B42-8F19-5DAD0063ED48}"/>
+              </a:ext>
+            </a:extLst>
+          </p:cNvPr>
+          <p:cNvSpPr>
+            <a:spLocks xmlns:a="http://schemas.openxmlformats.org/drawingml/2006/main" noGrp="1"/>
+          </p:cNvSpPr>
+          <p:nvPr/>
+        </p:nvSpPr>
+        <p:spPr>
+          <a:xfrm xmlns:a="http://schemas.openxmlformats.org/drawingml/2006/main">
+            <a:off x="971550" y="5772150"/>
+            <a:ext cx="13296900" cy="285750"/>
+          </a:xfrm>
+          <a:prstGeom xmlns:a="http://schemas.openxmlformats.org/drawingml/2006/main" prst="rect">
+            <a:avLst/>
+          </a:prstGeom>
+          <a:noFill xmlns:a="http://schemas.openxmlformats.org/drawingml/2006/main"/>
+          <a:ln xmlns:a="http://schemas.openxmlformats.org/drawingml/2006/main" w="0">
+            <a:noFill/>
+            <a:prstDash val="solid"/>
+          </a:ln>
+        </p:spPr>
+        <p:txBody>
+          <a:bodyPr xmlns:a="http://schemas.openxmlformats.org/drawingml/2006/main"/>
+          <a:lstStyle xmlns:a="http://schemas.openxmlformats.org/drawingml/2006/main"/>
+          <a:p xmlns:a="http://schemas.openxmlformats.org/drawingml/2006/main">
+            <a:pPr>
+              <a:defRPr sz="1500" b="1">
+                <a:solidFill>
+                  <a:srgbClr val="001B2E"/>
+                </a:solidFill>
+              </a:defRPr>
+            </a:pPr>
+            <a:r>
+              <a:rPr sz="1500" b="1">
+                <a:solidFill>
+                  <a:srgbClr val="001B2E"/>
+                </a:solidFill>
+              </a:rPr>
+              <a:t>3. What does a trace help locate?</a:t>
+            </a:r>
+          </a:p>
+        </p:txBody>
+      </p:sp>
+      <p:sp>
+        <p:nvSpPr>
+          <p:cNvPr id="13" name="quiz-options-3">
+            <a:extLst xmlns:a="http://schemas.openxmlformats.org/drawingml/2006/main">
+              <a:ext uri="{FF2B5EF4-FFF2-40B4-BE49-F238E27FC236}">
+                <a16:creationId xmlns:a16="http://schemas.microsoft.com/office/drawing/2014/main" id="{E44E3D9C-6EBE-4A6B-923C-6A87C616A7F5}"/>
+              </a:ext>
+            </a:extLst>
+          </p:cNvPr>
+          <p:cNvSpPr>
+            <a:spLocks xmlns:a="http://schemas.openxmlformats.org/drawingml/2006/main" noGrp="1"/>
+          </p:cNvSpPr>
+          <p:nvPr/>
+        </p:nvSpPr>
+        <p:spPr>
+          <a:xfrm xmlns:a="http://schemas.openxmlformats.org/drawingml/2006/main">
+            <a:off x="1257300" y="6076950"/>
+            <a:ext cx="13011150" cy="247650"/>
+          </a:xfrm>
+          <a:prstGeom xmlns:a="http://schemas.openxmlformats.org/drawingml/2006/main" prst="rect">
+            <a:avLst/>
+          </a:prstGeom>
+          <a:noFill xmlns:a="http://schemas.openxmlformats.org/drawingml/2006/main"/>
+          <a:ln xmlns:a="http://schemas.openxmlformats.org/drawingml/2006/main" w="0">
+            <a:noFill/>
+            <a:prstDash val="solid"/>
+          </a:ln>
+        </p:spPr>
+        <p:txBody>
+          <a:bodyPr xmlns:a="http://schemas.openxmlformats.org/drawingml/2006/main"/>
+          <a:lstStyle xmlns:a="http://schemas.openxmlformats.org/drawingml/2006/main"/>
+          <a:p xmlns:a="http://schemas.openxmlformats.org/drawingml/2006/main">
+            <a:pPr>
+              <a:defRPr sz="1200" b="0">
+                <a:solidFill>
+                  <a:srgbClr val="334155"/>
+                </a:solidFill>
+              </a:defRPr>
+            </a:pPr>
+            <a:r>
+              <a:rPr sz="1200" b="0">
+                <a:solidFill>
+                  <a:srgbClr val="334155"/>
+                </a:solidFill>
+              </a:rPr>
+              <a:t>A  Failure stage     |     B  Stock price     |     C  User password</a:t>
+            </a:r>
+          </a:p>
+        </p:txBody>
+      </p:sp>
+    </p:spTree>
+    <p:extLst>
+      <p:ext uri="{BB962C8B-B14F-4D97-AF65-F5344CB8AC3E}">
+        <p14:creationId xmlns:p14="http://schemas.microsoft.com/office/powerpoint/2010/main" val="1316229138"/>
+      </p:ext>
+    </p:extLst>
+  </p:cSld>
+</p:sld>
+</file>
+
+<file path=ppt/slides/slide9.xml><?xml version="1.0" encoding="utf-8"?>
+<p:sld xmlns:p="http://schemas.openxmlformats.org/presentationml/2006/main">
+  <p:cSld>
+    <p:bg>
+      <p:bgPr>
+        <a:solidFill xmlns:a="http://schemas.openxmlformats.org/drawingml/2006/main">
+          <a:srgbClr val="F5F5F5"/>
+        </a:solidFill>
+      </p:bgPr>
+    </p:bg>
+    <p:spTree>
+      <p:nvGrpSpPr>
+        <p:cNvPr id="1" name=""/>
+        <p:cNvGrpSpPr/>
+        <p:nvPr/>
+      </p:nvGrpSpPr>
+      <p:grpSpPr>
+        <a:xfrm xmlns:a="http://schemas.openxmlformats.org/drawingml/2006/main"/>
+      </p:grpSpPr>
+      <p:sp>
+        <p:nvSpPr>
+          <p:cNvPr id="7" name="">
+            <a:extLst xmlns:a="http://schemas.openxmlformats.org/drawingml/2006/main">
+              <a:ext uri="{FF2B5EF4-FFF2-40B4-BE49-F238E27FC236}">
+                <a16:creationId xmlns:a16="http://schemas.microsoft.com/office/drawing/2014/main" id="{2E1E88F9-4976-411E-8732-D45BE311BBD2}"/>
+              </a:ext>
+            </a:extLst>
+          </p:cNvPr>
+          <p:cNvSpPr>
+            <a:spLocks xmlns:a="http://schemas.openxmlformats.org/drawingml/2006/main" noGrp="1"/>
+          </p:cNvSpPr>
+          <p:nvPr/>
+        </p:nvSpPr>
+        <p:spPr>
+          <a:xfrm xmlns:a="http://schemas.openxmlformats.org/drawingml/2006/main">
+            <a:off x="971550" y="781050"/>
+            <a:ext cx="1257300" cy="76200"/>
+          </a:xfrm>
+          <a:prstGeom xmlns:a="http://schemas.openxmlformats.org/drawingml/2006/main" prst="rect">
+            <a:avLst/>
+          </a:prstGeom>
+          <a:solidFill xmlns:a="http://schemas.openxmlformats.org/drawingml/2006/main">
+            <a:srgbClr val="00A2EB"/>
+          </a:solidFill>
+          <a:ln xmlns:a="http://schemas.openxmlformats.org/drawingml/2006/main" w="0">
+            <a:solidFill>
+              <a:srgbClr val="00A2EB"/>
+            </a:solidFill>
+            <a:prstDash val="solid"/>
+          </a:ln>
+        </p:spPr>
+      </p:sp>
+      <p:sp>
+        <p:nvSpPr>
+          <p:cNvPr id="2" name="">
+            <a:extLst xmlns:a="http://schemas.openxmlformats.org/drawingml/2006/main">
+              <a:ext uri="{FF2B5EF4-FFF2-40B4-BE49-F238E27FC236}">
+                <a16:creationId xmlns:a16="http://schemas.microsoft.com/office/drawing/2014/main" id="{35C43047-00B1-4B7A-BB36-D272D2C9B6CA}"/>
+              </a:ext>
+            </a:extLst>
+          </p:cNvPr>
+          <p:cNvSpPr>
+            <a:spLocks xmlns:a="http://schemas.openxmlformats.org/drawingml/2006/main" noGrp="1"/>
+          </p:cNvSpPr>
+          <p:nvPr/>
+        </p:nvSpPr>
+        <p:spPr>
+          <a:xfrm xmlns:a="http://schemas.openxmlformats.org/drawingml/2006/main">
+            <a:off x="971550" y="1066800"/>
+            <a:ext cx="2857500" cy="419100"/>
+          </a:xfrm>
+          <a:prstGeom xmlns:a="http://schemas.openxmlformats.org/drawingml/2006/main" prst="rect">
+            <a:avLst/>
+          </a:prstGeom>
+          <a:noFill xmlns:a="http://schemas.openxmlformats.org/drawingml/2006/main"/>
+          <a:ln xmlns:a="http://schemas.openxmlformats.org/drawingml/2006/main" w="0">
+            <a:noFill/>
+            <a:prstDash val="solid"/>
+          </a:ln>
+        </p:spPr>
+        <p:txBody>
+          <a:bodyPr xmlns:a="http://schemas.openxmlformats.org/drawingml/2006/main" wrap="square" lIns="0" tIns="0" rIns="0" bIns="0" anchor="ctr">
+            <a:normAutofit fontScale="100000"/>
+          </a:bodyPr>
+          <a:lstStyle xmlns:a="http://schemas.openxmlformats.org/drawingml/2006/main"/>
+          <a:p xmlns:a="http://schemas.openxmlformats.org/drawingml/2006/main">
+            <a:pPr algn="l">
+              <a:lnSpc>
+                <a:spcPct val="100000"/>
+              </a:lnSpc>
+              <a:buNone/>
+              <a:defRPr sz="1575" b="1">
+                <a:solidFill>
+                  <a:srgbClr val="1F40CB"/>
+                </a:solidFill>
+                <a:latin typeface="Calibri"/>
+                <a:ea typeface="Calibri"/>
+                <a:cs typeface="Calibri"/>
+              </a:defRPr>
+            </a:pPr>
+            <a:r>
+              <a:rPr sz="1575" b="1">
+                <a:solidFill>
+                  <a:srgbClr val="1F40CB"/>
+                </a:solidFill>
+                <a:latin typeface="Calibri"/>
+                <a:ea typeface="Calibri"/>
+                <a:cs typeface="Calibri"/>
+              </a:rPr>
+              <a:t>FIRST FINANCE</a:t>
+            </a:r>
+          </a:p>
+        </p:txBody>
+      </p:sp>
+      <p:sp>
+        <p:nvSpPr>
+          <p:cNvPr id="3" name="">
+            <a:extLst xmlns:a="http://schemas.openxmlformats.org/drawingml/2006/main">
+              <a:ext uri="{FF2B5EF4-FFF2-40B4-BE49-F238E27FC236}">
+                <a16:creationId xmlns:a16="http://schemas.microsoft.com/office/drawing/2014/main" id="{2EBB9B00-5773-4D90-9774-8BB7FE35221F}"/>
+              </a:ext>
+            </a:extLst>
+          </p:cNvPr>
+          <p:cNvSpPr>
+            <a:spLocks xmlns:a="http://schemas.openxmlformats.org/drawingml/2006/main" noGrp="1"/>
+          </p:cNvSpPr>
+          <p:nvPr/>
+        </p:nvSpPr>
+        <p:spPr>
+          <a:xfrm xmlns:a="http://schemas.openxmlformats.org/drawingml/2006/main">
+            <a:off x="971550" y="2362200"/>
+            <a:ext cx="13296900" cy="895350"/>
+          </a:xfrm>
+          <a:prstGeom xmlns:a="http://schemas.openxmlformats.org/drawingml/2006/main" prst="rect">
+            <a:avLst/>
+          </a:prstGeom>
+          <a:noFill xmlns:a="http://schemas.openxmlformats.org/drawingml/2006/main"/>
+          <a:ln xmlns:a="http://schemas.openxmlformats.org/drawingml/2006/main" w="0">
+            <a:noFill/>
+            <a:prstDash val="solid"/>
+          </a:ln>
+        </p:spPr>
+        <p:txBody>
+          <a:bodyPr xmlns:a="http://schemas.openxmlformats.org/drawingml/2006/main" wrap="none" lIns="0" tIns="0" rIns="0" bIns="0" anchor="ctr">
+            <a:normAutofit fontScale="100000"/>
+          </a:bodyPr>
+          <a:lstStyle xmlns:a="http://schemas.openxmlformats.org/drawingml/2006/main"/>
+          <a:p xmlns:a="http://schemas.openxmlformats.org/drawingml/2006/main">
+            <a:pPr algn="l">
+              <a:lnSpc>
+                <a:spcPct val="100000"/>
+              </a:lnSpc>
+              <a:buNone/>
+              <a:defRPr sz="4800" b="1">
+                <a:solidFill>
+                  <a:srgbClr val="051C2A"/>
+                </a:solidFill>
+                <a:latin typeface="Calibri"/>
+                <a:ea typeface="Calibri"/>
+                <a:cs typeface="Calibri"/>
+              </a:defRPr>
+            </a:pPr>
+            <a:r>
+              <a:rPr sz="4800" b="1">
+                <a:solidFill>
+                  <a:srgbClr val="051C2A"/>
+                </a:solidFill>
+                <a:latin typeface="Calibri"/>
+                <a:ea typeface="Calibri"/>
+                <a:cs typeface="Calibri"/>
+              </a:rPr>
+              <a:t>Answers</a:t>
+            </a:r>
+          </a:p>
+        </p:txBody>
+      </p:sp>
+      <p:sp>
+        <p:nvSpPr>
+          <p:cNvPr id="4" name="">
+            <a:extLst xmlns:a="http://schemas.openxmlformats.org/drawingml/2006/main">
+              <a:ext uri="{FF2B5EF4-FFF2-40B4-BE49-F238E27FC236}">
+                <a16:creationId xmlns:a16="http://schemas.microsoft.com/office/drawing/2014/main" id="{601F96F8-8EA3-4B69-A3AF-EBD5CBCD09C1}"/>
+              </a:ext>
+            </a:extLst>
+          </p:cNvPr>
+          <p:cNvSpPr>
+            <a:spLocks xmlns:a="http://schemas.openxmlformats.org/drawingml/2006/main" noGrp="1"/>
+          </p:cNvSpPr>
+          <p:nvPr/>
+        </p:nvSpPr>
+        <p:spPr>
+          <a:xfrm xmlns:a="http://schemas.openxmlformats.org/drawingml/2006/main">
+            <a:off x="971550" y="3562350"/>
+            <a:ext cx="11239500" cy="514350"/>
+          </a:xfrm>
+          <a:prstGeom xmlns:a="http://schemas.openxmlformats.org/drawingml/2006/main" prst="rect">
+            <a:avLst/>
+          </a:prstGeom>
+          <a:noFill xmlns:a="http://schemas.openxmlformats.org/drawingml/2006/main"/>
+          <a:ln xmlns:a="http://schemas.openxmlformats.org/drawingml/2006/main" w="0">
+            <a:noFill/>
+            <a:prstDash val="solid"/>
+          </a:ln>
+        </p:spPr>
+        <p:txBody>
+          <a:bodyPr xmlns:a="http://schemas.openxmlformats.org/drawingml/2006/main" wrap="square" lIns="0" tIns="0" rIns="0" bIns="0" anchor="ctr">
+            <a:normAutofit fontScale="100000"/>
+          </a:bodyPr>
+          <a:lstStyle xmlns:a="http://schemas.openxmlformats.org/drawingml/2006/main"/>
+          <a:p xmlns:a="http://schemas.openxmlformats.org/drawingml/2006/main">
+            <a:pPr algn="l">
+              <a:lnSpc>
+                <a:spcPct val="100000"/>
+              </a:lnSpc>
+              <a:buNone/>
+              <a:defRPr sz="2400" b="0">
+                <a:solidFill>
+                  <a:srgbClr val="3F3F42"/>
+                </a:solidFill>
+                <a:latin typeface="Calibri"/>
+                <a:ea typeface="Calibri"/>
+                <a:cs typeface="Calibri"/>
+              </a:defRPr>
+            </a:pPr>
+            <a:r>
+              <a:rPr sz="2400" b="0">
+                <a:solidFill>
+                  <a:srgbClr val="3F3F42"/>
+                </a:solidFill>
+                <a:latin typeface="Calibri"/>
+                <a:ea typeface="Calibri"/>
+                <a:cs typeface="Calibri"/>
+              </a:rPr>
+              <a:t>Check the idea, not only the letter.</a:t>
+            </a:r>
+          </a:p>
+        </p:txBody>
+      </p:sp>
+      <p:sp>
+        <p:nvSpPr>
+          <p:cNvPr id="5" name="">
+            <a:extLst xmlns:a="http://schemas.openxmlformats.org/drawingml/2006/main">
+              <a:ext uri="{FF2B5EF4-FFF2-40B4-BE49-F238E27FC236}">
+                <a16:creationId xmlns:a16="http://schemas.microsoft.com/office/drawing/2014/main" id="{D4A6E89B-2708-4600-B820-727EF660DE6B}"/>
+              </a:ext>
+            </a:extLst>
+          </p:cNvPr>
+          <p:cNvSpPr>
+            <a:spLocks xmlns:a="http://schemas.openxmlformats.org/drawingml/2006/main" noGrp="1"/>
+          </p:cNvSpPr>
+          <p:nvPr/>
+        </p:nvSpPr>
+        <p:spPr>
+          <a:xfrm xmlns:a="http://schemas.openxmlformats.org/drawingml/2006/main">
+            <a:off x="971550" y="6477000"/>
+            <a:ext cx="9525000" cy="400050"/>
+          </a:xfrm>
+          <a:prstGeom xmlns:a="http://schemas.openxmlformats.org/drawingml/2006/main" prst="rect">
+            <a:avLst/>
+          </a:prstGeom>
+          <a:noFill xmlns:a="http://schemas.openxmlformats.org/drawingml/2006/main"/>
+          <a:ln xmlns:a="http://schemas.openxmlformats.org/drawingml/2006/main" w="0">
+            <a:noFill/>
+            <a:prstDash val="solid"/>
+          </a:ln>
+        </p:spPr>
+        <p:txBody>
+          <a:bodyPr xmlns:a="http://schemas.openxmlformats.org/drawingml/2006/main" wrap="square" lIns="0" tIns="0" rIns="0" bIns="0" anchor="ctr">
+            <a:normAutofit fontScale="100000"/>
+          </a:bodyPr>
+          <a:lstStyle xmlns:a="http://schemas.openxmlformats.org/drawingml/2006/main"/>
+          <a:p xmlns:a="http://schemas.openxmlformats.org/drawingml/2006/main">
+            <a:pPr algn="l">
+              <a:lnSpc>
+                <a:spcPct val="100000"/>
+              </a:lnSpc>
+              <a:buNone/>
+              <a:defRPr sz="1350" b="1">
+                <a:solidFill>
+                  <a:srgbClr val="1F40CB"/>
+                </a:solidFill>
+                <a:latin typeface="Calibri"/>
+                <a:ea typeface="Calibri"/>
+                <a:cs typeface="Calibri"/>
+              </a:defRPr>
+            </a:pPr>
+            <a:r>
+              <a:rPr sz="1350" b="1">
+                <a:solidFill>
+                  <a:srgbClr val="1F40CB"/>
+                </a:solidFill>
+                <a:latin typeface="Calibri"/>
+                <a:ea typeface="Calibri"/>
+                <a:cs typeface="Calibri"/>
+              </a:rPr>
+              <a:t>LESSON 07  ·  CORRECTION</a:t>
+            </a:r>
+          </a:p>
+        </p:txBody>
+      </p:sp>
+      <p:sp>
+        <p:nvSpPr>
+          <p:cNvPr id="6" name="">
+            <a:extLst xmlns:a="http://schemas.openxmlformats.org/drawingml/2006/main">
+              <a:ext uri="{FF2B5EF4-FFF2-40B4-BE49-F238E27FC236}">
+                <a16:creationId xmlns:a16="http://schemas.microsoft.com/office/drawing/2014/main" id="{053831D6-7D46-4F1A-929F-D2CAD97F1627}"/>
+              </a:ext>
+            </a:extLst>
+          </p:cNvPr>
+          <p:cNvSpPr>
+            <a:spLocks xmlns:a="http://schemas.openxmlformats.org/drawingml/2006/main" noGrp="1"/>
+          </p:cNvSpPr>
+          <p:nvPr/>
+        </p:nvSpPr>
+        <p:spPr>
+          <a:xfrm xmlns:a="http://schemas.openxmlformats.org/drawingml/2006/main">
+            <a:off x="971550" y="7067550"/>
+            <a:ext cx="4762500" cy="381000"/>
+          </a:xfrm>
+          <a:prstGeom xmlns:a="http://schemas.openxmlformats.org/drawingml/2006/main" prst="rect">
+            <a:avLst/>
+          </a:prstGeom>
+          <a:noFill xmlns:a="http://schemas.openxmlformats.org/drawingml/2006/main"/>
+          <a:ln xmlns:a="http://schemas.openxmlformats.org/drawingml/2006/main" w="0">
+            <a:noFill/>
+            <a:prstDash val="solid"/>
+          </a:ln>
+        </p:spPr>
+        <p:txBody>
+          <a:bodyPr xmlns:a="http://schemas.openxmlformats.org/drawingml/2006/main" wrap="square" lIns="0" tIns="0" rIns="0" bIns="0" anchor="ctr">
+            <a:normAutofit fontScale="100000"/>
+          </a:bodyPr>
+          <a:lstStyle xmlns:a="http://schemas.openxmlformats.org/drawingml/2006/main"/>
+          <a:p xmlns:a="http://schemas.openxmlformats.org/drawingml/2006/main">
+            <a:pPr algn="l">
+              <a:lnSpc>
+                <a:spcPct val="100000"/>
+              </a:lnSpc>
+              <a:buNone/>
+              <a:defRPr sz="1725" b="0">
+                <a:solidFill>
+                  <a:srgbClr val="051C2A"/>
+                </a:solidFill>
+                <a:latin typeface="Calibri"/>
+                <a:ea typeface="Calibri"/>
+                <a:cs typeface="Calibri"/>
+              </a:defRPr>
+            </a:pPr>
+            <a:r>
+              <a:rPr sz="1725" b="0">
+                <a:solidFill>
+                  <a:srgbClr val="051C2A"/>
+                </a:solidFill>
+                <a:latin typeface="Calibri"/>
+                <a:ea typeface="Calibri"/>
+                <a:cs typeface="Calibri"/>
+              </a:rPr>
+              <a:t>First Finance - Arnaud Demes</a:t>
+            </a:r>
+          </a:p>
+        </p:txBody>
+      </p:sp>
+      <p:sp>
+        <p:nvSpPr>
+          <p:cNvPr id="8" name="quiz-answer-1">
+            <a:extLst xmlns:a="http://schemas.openxmlformats.org/drawingml/2006/main">
+              <a:ext uri="{FF2B5EF4-FFF2-40B4-BE49-F238E27FC236}">
+                <a16:creationId xmlns:a16="http://schemas.microsoft.com/office/drawing/2014/main" id="{ED28019D-94CD-4808-B354-2F85C34FF0E2}"/>
+              </a:ext>
+            </a:extLst>
+          </p:cNvPr>
+          <p:cNvSpPr>
+            <a:spLocks xmlns:a="http://schemas.openxmlformats.org/drawingml/2006/main" noGrp="1"/>
+          </p:cNvSpPr>
+          <p:nvPr/>
+        </p:nvSpPr>
+        <p:spPr>
+          <a:xfrm xmlns:a="http://schemas.openxmlformats.org/drawingml/2006/main">
+            <a:off x="971550" y="4400550"/>
+            <a:ext cx="13296900" cy="285750"/>
+          </a:xfrm>
+          <a:prstGeom xmlns:a="http://schemas.openxmlformats.org/drawingml/2006/main" prst="rect">
+            <a:avLst/>
+          </a:prstGeom>
+          <a:noFill xmlns:a="http://schemas.openxmlformats.org/drawingml/2006/main"/>
+          <a:ln xmlns:a="http://schemas.openxmlformats.org/drawingml/2006/main" w="0">
+            <a:noFill/>
+            <a:prstDash val="solid"/>
+          </a:ln>
+        </p:spPr>
+        <p:txBody>
+          <a:bodyPr xmlns:a="http://schemas.openxmlformats.org/drawingml/2006/main"/>
+          <a:lstStyle xmlns:a="http://schemas.openxmlformats.org/drawingml/2006/main"/>
+          <a:p xmlns:a="http://schemas.openxmlformats.org/drawingml/2006/main">
+            <a:pPr>
+              <a:defRPr sz="1500" b="1">
+                <a:solidFill>
+                  <a:srgbClr val="1F40CB"/>
+                </a:solidFill>
+              </a:defRPr>
+            </a:pPr>
+            <a:r>
+              <a:rPr sz="1500" b="1">
+                <a:solidFill>
+                  <a:srgbClr val="1F40CB"/>
+                </a:solidFill>
+              </a:rPr>
+              <a:t>1. A. Yes</a:t>
+            </a:r>
+          </a:p>
+        </p:txBody>
+      </p:sp>
+      <p:sp>
+        <p:nvSpPr>
+          <p:cNvPr id="9" name="quiz-explanation-1">
+            <a:extLst xmlns:a="http://schemas.openxmlformats.org/drawingml/2006/main">
+              <a:ext uri="{FF2B5EF4-FFF2-40B4-BE49-F238E27FC236}">
+                <a16:creationId xmlns:a16="http://schemas.microsoft.com/office/drawing/2014/main" id="{44E25351-5651-44DE-A939-B24E767BB5CF}"/>
+              </a:ext>
+            </a:extLst>
+          </p:cNvPr>
+          <p:cNvSpPr>
+            <a:spLocks xmlns:a="http://schemas.openxmlformats.org/drawingml/2006/main" noGrp="1"/>
+          </p:cNvSpPr>
+          <p:nvPr/>
+        </p:nvSpPr>
+        <p:spPr>
+          <a:xfrm xmlns:a="http://schemas.openxmlformats.org/drawingml/2006/main">
+            <a:off x="1257300" y="4705350"/>
+            <a:ext cx="13011150" cy="247650"/>
+          </a:xfrm>
+          <a:prstGeom xmlns:a="http://schemas.openxmlformats.org/drawingml/2006/main" prst="rect">
+            <a:avLst/>
+          </a:prstGeom>
+          <a:noFill xmlns:a="http://schemas.openxmlformats.org/drawingml/2006/main"/>
+          <a:ln xmlns:a="http://schemas.openxmlformats.org/drawingml/2006/main" w="0">
+            <a:noFill/>
+            <a:prstDash val="solid"/>
+          </a:ln>
+        </p:spPr>
+        <p:txBody>
+          <a:bodyPr xmlns:a="http://schemas.openxmlformats.org/drawingml/2006/main"/>
+          <a:lstStyle xmlns:a="http://schemas.openxmlformats.org/drawingml/2006/main"/>
+          <a:p xmlns:a="http://schemas.openxmlformats.org/drawingml/2006/main">
+            <a:pPr>
+              <a:defRPr sz="1200" b="0">
+                <a:solidFill>
+                  <a:srgbClr val="334155"/>
+                </a:solidFill>
+              </a:defRPr>
+            </a:pPr>
+            <a:r>
+              <a:rPr sz="1200" b="0">
+                <a:solidFill>
+                  <a:srgbClr val="334155"/>
+                </a:solidFill>
+              </a:rPr>
+              <a:t>The right passage may be retrieved but omitted or cited incorrectly.</a:t>
+            </a:r>
+          </a:p>
+        </p:txBody>
+      </p:sp>
+      <p:sp>
+        <p:nvSpPr>
+          <p:cNvPr id="10" name="quiz-answer-2">
+            <a:extLst xmlns:a="http://schemas.openxmlformats.org/drawingml/2006/main">
+              <a:ext uri="{FF2B5EF4-FFF2-40B4-BE49-F238E27FC236}">
+                <a16:creationId xmlns:a16="http://schemas.microsoft.com/office/drawing/2014/main" id="{FB75725F-7D5C-4E65-AC88-2A337C23E3D1}"/>
+              </a:ext>
+            </a:extLst>
+          </p:cNvPr>
+          <p:cNvSpPr>
+            <a:spLocks xmlns:a="http://schemas.openxmlformats.org/drawingml/2006/main" noGrp="1"/>
+          </p:cNvSpPr>
+          <p:nvPr/>
+        </p:nvSpPr>
+        <p:spPr>
+          <a:xfrm xmlns:a="http://schemas.openxmlformats.org/drawingml/2006/main">
+            <a:off x="971550" y="5086350"/>
+            <a:ext cx="13296900" cy="285750"/>
+          </a:xfrm>
+          <a:prstGeom xmlns:a="http://schemas.openxmlformats.org/drawingml/2006/main" prst="rect">
+            <a:avLst/>
+          </a:prstGeom>
+          <a:noFill xmlns:a="http://schemas.openxmlformats.org/drawingml/2006/main"/>
+          <a:ln xmlns:a="http://schemas.openxmlformats.org/drawingml/2006/main" w="0">
+            <a:noFill/>
+            <a:prstDash val="solid"/>
+          </a:ln>
+        </p:spPr>
+        <p:txBody>
+          <a:bodyPr xmlns:a="http://schemas.openxmlformats.org/drawingml/2006/main"/>
+          <a:lstStyle xmlns:a="http://schemas.openxmlformats.org/drawingml/2006/main"/>
+          <a:p xmlns:a="http://schemas.openxmlformats.org/drawingml/2006/main">
+            <a:pPr>
+              <a:defRPr sz="1500" b="1">
+                <a:solidFill>
+                  <a:srgbClr val="1F40CB"/>
+                </a:solidFill>
+              </a:defRPr>
+            </a:pPr>
+            <a:r>
+              <a:rPr sz="1500" b="1">
+                <a:solidFill>
+                  <a:srgbClr val="1F40CB"/>
+                </a:solidFill>
+              </a:rPr>
+              <a:t>2. A. Golden set</a:t>
+            </a:r>
+          </a:p>
+        </p:txBody>
+      </p:sp>
+      <p:sp>
+        <p:nvSpPr>
+          <p:cNvPr id="11" name="quiz-explanation-2">
+            <a:extLst xmlns:a="http://schemas.openxmlformats.org/drawingml/2006/main">
+              <a:ext uri="{FF2B5EF4-FFF2-40B4-BE49-F238E27FC236}">
+                <a16:creationId xmlns:a16="http://schemas.microsoft.com/office/drawing/2014/main" id="{C1DE7683-CCD0-4AAD-8D0E-E63A8B8A9EF7}"/>
+              </a:ext>
+            </a:extLst>
+          </p:cNvPr>
+          <p:cNvSpPr>
+            <a:spLocks xmlns:a="http://schemas.openxmlformats.org/drawingml/2006/main" noGrp="1"/>
+          </p:cNvSpPr>
+          <p:nvPr/>
+        </p:nvSpPr>
+        <p:spPr>
+          <a:xfrm xmlns:a="http://schemas.openxmlformats.org/drawingml/2006/main">
+            <a:off x="1257300" y="5391150"/>
+            <a:ext cx="13011150" cy="247650"/>
+          </a:xfrm>
+          <a:prstGeom xmlns:a="http://schemas.openxmlformats.org/drawingml/2006/main" prst="rect">
+            <a:avLst/>
+          </a:prstGeom>
+          <a:noFill xmlns:a="http://schemas.openxmlformats.org/drawingml/2006/main"/>
+          <a:ln xmlns:a="http://schemas.openxmlformats.org/drawingml/2006/main" w="0">
+            <a:noFill/>
+            <a:prstDash val="solid"/>
+          </a:ln>
+        </p:spPr>
+        <p:txBody>
+          <a:bodyPr xmlns:a="http://schemas.openxmlformats.org/drawingml/2006/main"/>
+          <a:lstStyle xmlns:a="http://schemas.openxmlformats.org/drawingml/2006/main"/>
+          <a:p xmlns:a="http://schemas.openxmlformats.org/drawingml/2006/main">
+            <a:pPr>
+              <a:defRPr sz="1200" b="0">
+                <a:solidFill>
+                  <a:srgbClr val="334155"/>
+                </a:solidFill>
+              </a:defRPr>
+            </a:pPr>
+            <a:r>
+              <a:rPr sz="1200" b="0">
+                <a:solidFill>
+                  <a:srgbClr val="334155"/>
+                </a:solidFill>
+              </a:rPr>
+              <a:t>A controlled comparison changes one configuration variable at a time.</a:t>
+            </a:r>
+          </a:p>
+        </p:txBody>
+      </p:sp>
+      <p:sp>
+        <p:nvSpPr>
+          <p:cNvPr id="12" name="quiz-answer-3">
+            <a:extLst xmlns:a="http://schemas.openxmlformats.org/drawingml/2006/main">
+              <a:ext uri="{FF2B5EF4-FFF2-40B4-BE49-F238E27FC236}">
+                <a16:creationId xmlns:a16="http://schemas.microsoft.com/office/drawing/2014/main" id="{E9C36364-E9F3-4510-9444-CF521C5ED962}"/>
+              </a:ext>
+            </a:extLst>
+          </p:cNvPr>
+          <p:cNvSpPr>
+            <a:spLocks xmlns:a="http://schemas.openxmlformats.org/drawingml/2006/main" noGrp="1"/>
+          </p:cNvSpPr>
+          <p:nvPr/>
+        </p:nvSpPr>
+        <p:spPr>
+          <a:xfrm xmlns:a="http://schemas.openxmlformats.org/drawingml/2006/main">
+            <a:off x="971550" y="5772150"/>
+            <a:ext cx="13296900" cy="285750"/>
+          </a:xfrm>
+          <a:prstGeom xmlns:a="http://schemas.openxmlformats.org/drawingml/2006/main" prst="rect">
+            <a:avLst/>
+          </a:prstGeom>
+          <a:noFill xmlns:a="http://schemas.openxmlformats.org/drawingml/2006/main"/>
+          <a:ln xmlns:a="http://schemas.openxmlformats.org/drawingml/2006/main" w="0">
+            <a:noFill/>
+            <a:prstDash val="solid"/>
+          </a:ln>
+        </p:spPr>
+        <p:txBody>
+          <a:bodyPr xmlns:a="http://schemas.openxmlformats.org/drawingml/2006/main"/>
+          <a:lstStyle xmlns:a="http://schemas.openxmlformats.org/drawingml/2006/main"/>
+          <a:p xmlns:a="http://schemas.openxmlformats.org/drawingml/2006/main">
+            <a:pPr>
+              <a:defRPr sz="1500" b="1">
+                <a:solidFill>
+                  <a:srgbClr val="1F40CB"/>
+                </a:solidFill>
+              </a:defRPr>
+            </a:pPr>
+            <a:r>
+              <a:rPr sz="1500" b="1">
+                <a:solidFill>
+                  <a:srgbClr val="1F40CB"/>
+                </a:solidFill>
+              </a:rPr>
+              <a:t>3. A. Failure stage</a:t>
+            </a:r>
+          </a:p>
+        </p:txBody>
+      </p:sp>
+      <p:sp>
+        <p:nvSpPr>
+          <p:cNvPr id="13" name="quiz-explanation-3">
+            <a:extLst xmlns:a="http://schemas.openxmlformats.org/drawingml/2006/main">
+              <a:ext uri="{FF2B5EF4-FFF2-40B4-BE49-F238E27FC236}">
+                <a16:creationId xmlns:a16="http://schemas.microsoft.com/office/drawing/2014/main" id="{7D20A813-E21E-43E2-9789-7101D8934196}"/>
+              </a:ext>
+            </a:extLst>
+          </p:cNvPr>
+          <p:cNvSpPr>
+            <a:spLocks xmlns:a="http://schemas.openxmlformats.org/drawingml/2006/main" noGrp="1"/>
+          </p:cNvSpPr>
+          <p:nvPr/>
+        </p:nvSpPr>
+        <p:spPr>
+          <a:xfrm xmlns:a="http://schemas.openxmlformats.org/drawingml/2006/main">
+            <a:off x="1257300" y="6076950"/>
+            <a:ext cx="13011150" cy="247650"/>
+          </a:xfrm>
+          <a:prstGeom xmlns:a="http://schemas.openxmlformats.org/drawingml/2006/main" prst="rect">
+            <a:avLst/>
+          </a:prstGeom>
+          <a:noFill xmlns:a="http://schemas.openxmlformats.org/drawingml/2006/main"/>
+          <a:ln xmlns:a="http://schemas.openxmlformats.org/drawingml/2006/main" w="0">
+            <a:noFill/>
+            <a:prstDash val="solid"/>
+          </a:ln>
+        </p:spPr>
+        <p:txBody>
+          <a:bodyPr xmlns:a="http://schemas.openxmlformats.org/drawingml/2006/main"/>
+          <a:lstStyle xmlns:a="http://schemas.openxmlformats.org/drawingml/2006/main"/>
+          <a:p xmlns:a="http://schemas.openxmlformats.org/drawingml/2006/main">
+            <a:pPr>
+              <a:defRPr sz="1200" b="0">
+                <a:solidFill>
+                  <a:srgbClr val="334155"/>
+                </a:solidFill>
+              </a:defRPr>
+            </a:pPr>
+            <a:r>
+              <a:rPr sz="1200" b="0">
+                <a:solidFill>
+                  <a:srgbClr val="334155"/>
+                </a:solidFill>
+              </a:rPr>
+              <a:t>A trace links one question to each stage, timing and output.</a:t>
+            </a:r>
+          </a:p>
+        </p:txBody>
+      </p:sp>
+    </p:spTree>
+    <p:extLst>
+      <p:ext uri="{BB962C8B-B14F-4D97-AF65-F5344CB8AC3E}">
+        <p14:creationId xmlns:p14="http://schemas.microsoft.com/office/powerpoint/2010/main" val="1316229138"/>
       </p:ext>
     </p:extLst>
   </p:cSld>
